--- a/Presentation/Final Presentation.pptx
+++ b/Presentation/Final Presentation.pptx
@@ -165,6 +165,7 @@
 <file path=ppt/revisionInfo.xml><?xml version="1.0" encoding="utf-8"?>
 <p1510:revInfo xmlns:a="http://schemas.openxmlformats.org/drawingml/2006/main" xmlns:r="http://schemas.openxmlformats.org/officeDocument/2006/relationships" xmlns:p1510="http://schemas.microsoft.com/office/powerpoint/2015/10/main">
   <p1510:revLst>
+    <p1510:client id="{5E46A433-1FA0-D1FC-74D7-69BCF5CED0C4}" v="56" dt="2025-05-01T18:11:51.798"/>
     <p1510:client id="{C511EA29-736D-6307-F786-653A3E53EBF8}" v="2487" dt="2025-05-01T09:53:38.318"/>
   </p1510:revLst>
 </p1510:revInfo>
@@ -2513,7 +2514,7 @@
           <a:p>
             <a:fld id="{DEF75CB5-5666-5049-9AE0-38EFD385C21E}" type="slidenum">
               <a:rPr lang="en-US" smtClean="0"/>
-              <a:t>24</a:t>
+              <a:t>25</a:t>
             </a:fld>
             <a:endParaRPr lang="en-US" dirty="0"/>
           </a:p>
@@ -13356,12 +13357,12 @@
           <a:lstStyle/>
           <a:p>
             <a:r>
-              <a:rPr lang="en-US">
+              <a:rPr lang="en-US" dirty="0">
                 <a:cs typeface="Biome Light"/>
               </a:rPr>
-              <a:t>Model PErformance</a:t>
+              <a:t>Model Performance</a:t>
             </a:r>
-            <a:endParaRPr lang="en-US" dirty="0"/>
+            <a:endParaRPr lang="en-US" dirty="0" err="1"/>
           </a:p>
         </p:txBody>
       </p:sp>
@@ -13465,12 +13466,12 @@
           <a:lstStyle/>
           <a:p>
             <a:r>
-              <a:rPr lang="en-US">
+              <a:rPr lang="en-US" dirty="0">
                 <a:cs typeface="Biome"/>
               </a:rPr>
-              <a:t>Performance: LTSM Loss</a:t>
+              <a:t>Performance: LSTM Loss</a:t>
             </a:r>
-            <a:endParaRPr lang="en-US"/>
+            <a:endParaRPr lang="en-US" dirty="0"/>
           </a:p>
         </p:txBody>
       </p:sp>
@@ -13765,8 +13766,10 @@
           <a:lstStyle/>
           <a:p>
             <a:r>
-              <a:rPr lang="en-US"/>
-              <a:t>Performance: LTSM Prediction</a:t>
+              <a:rPr lang="en-US" dirty="0">
+                <a:cs typeface="Biome"/>
+              </a:rPr>
+              <a:t>Performance: LSTM Prediction</a:t>
             </a:r>
           </a:p>
         </p:txBody>
@@ -14059,12 +14062,12 @@
           <a:lstStyle/>
           <a:p>
             <a:r>
-              <a:rPr lang="en-US">
+              <a:rPr lang="en-US" dirty="0">
                 <a:cs typeface="Biome"/>
               </a:rPr>
-              <a:t>Performance: LTSM vs GRU</a:t>
+              <a:t>Performance: LSTM vs GRU</a:t>
             </a:r>
-            <a:endParaRPr lang="en-US"/>
+            <a:endParaRPr lang="en-US" dirty="0"/>
           </a:p>
         </p:txBody>
       </p:sp>
@@ -14475,12 +14478,12 @@
           <a:lstStyle/>
           <a:p>
             <a:r>
-              <a:rPr lang="en-US">
+              <a:rPr lang="en-US" dirty="0">
                 <a:cs typeface="Biome"/>
               </a:rPr>
-              <a:t>Conclusions: LTSM vs GRU</a:t>
+              <a:t>Conclusions: LSTM vs GRU</a:t>
             </a:r>
-            <a:endParaRPr lang="en-US"/>
+            <a:endParaRPr lang="en-US" dirty="0"/>
           </a:p>
         </p:txBody>
       </p:sp>
@@ -14513,13 +14516,13 @@
           <a:lstStyle/>
           <a:p>
             <a:r>
-              <a:rPr lang="en-US">
+              <a:rPr lang="en-US" dirty="0">
                 <a:cs typeface="Biome"/>
               </a:rPr>
               <a:t>GRU </a:t>
             </a:r>
             <a:r>
-              <a:rPr lang="en-US" b="1">
+              <a:rPr lang="en-US" b="1" dirty="0">
                 <a:solidFill>
                   <a:schemeClr val="accent3"/>
                 </a:solidFill>
@@ -14528,12 +14531,12 @@
               <a:t>outperformed </a:t>
             </a:r>
             <a:r>
-              <a:rPr lang="en-US">
+              <a:rPr lang="en-US" dirty="0">
                 <a:cs typeface="Biome"/>
               </a:rPr>
-              <a:t>the LTSM model on NVIDIA stock prediction</a:t>
+              <a:t>the LSTM model on NVIDIA stock prediction</a:t>
             </a:r>
-            <a:endParaRPr lang="en-US"/>
+            <a:endParaRPr lang="en-US" dirty="0"/>
           </a:p>
           <a:p>
             <a:endParaRPr lang="en-US" dirty="0">
@@ -14542,14 +14545,11 @@
           </a:p>
           <a:p>
             <a:r>
-              <a:rPr lang="en-US">
+              <a:rPr lang="en-US" dirty="0">
                 <a:cs typeface="Biome"/>
               </a:rPr>
               <a:t>Why is this?</a:t>
             </a:r>
-            <a:endParaRPr lang="en-US" dirty="0">
-              <a:cs typeface="Biome"/>
-            </a:endParaRPr>
           </a:p>
           <a:p>
             <a:pPr lvl="1">
@@ -14557,14 +14557,23 @@
               <a:buChar char="o"/>
             </a:pPr>
             <a:r>
-              <a:rPr lang="en-US">
+              <a:rPr lang="en-US" dirty="0">
                 <a:cs typeface="Biome"/>
               </a:rPr>
-              <a:t>GRU can have comperable performance to LTSM on smaller datasets (Chung et al. (2014))</a:t>
+              <a:t>GRU can have </a:t>
             </a:r>
-            <a:endParaRPr lang="en-US" dirty="0">
-              <a:cs typeface="Biome"/>
-            </a:endParaRPr>
+            <a:r>
+              <a:rPr lang="en-US" dirty="0" err="1">
+                <a:cs typeface="Biome"/>
+              </a:rPr>
+              <a:t>comperable</a:t>
+            </a:r>
+            <a:r>
+              <a:rPr lang="en-US" dirty="0">
+                <a:cs typeface="Biome"/>
+              </a:rPr>
+              <a:t> performance to LSTM on smaller datasets (Chung et al. (2014))</a:t>
+            </a:r>
           </a:p>
           <a:p>
             <a:pPr lvl="1">
@@ -14572,14 +14581,23 @@
               <a:buChar char="o"/>
             </a:pPr>
             <a:r>
-              <a:rPr lang="en-US">
+              <a:rPr lang="en-US" dirty="0">
                 <a:cs typeface="Biome"/>
               </a:rPr>
-              <a:t>GRUs adapt to changes in data faster than LTSMs, and NVIDIA is a volitile stock</a:t>
+              <a:t>GRUs adapt to changes in data faster than LSTMs, and NVIDIA is a </a:t>
             </a:r>
-            <a:endParaRPr lang="en-US" dirty="0">
-              <a:cs typeface="Biome"/>
-            </a:endParaRPr>
+            <a:r>
+              <a:rPr lang="en-US" dirty="0" err="1">
+                <a:cs typeface="Biome"/>
+              </a:rPr>
+              <a:t>volitile</a:t>
+            </a:r>
+            <a:r>
+              <a:rPr lang="en-US" dirty="0">
+                <a:cs typeface="Biome"/>
+              </a:rPr>
+              <a:t> stock</a:t>
+            </a:r>
           </a:p>
         </p:txBody>
       </p:sp>
@@ -14681,12 +14699,12 @@
           <a:lstStyle/>
           <a:p>
             <a:r>
-              <a:rPr lang="en-US">
+              <a:rPr lang="en-US" dirty="0">
                 <a:cs typeface="Biome"/>
               </a:rPr>
-              <a:t>Conclusions: LTSM vs GRU</a:t>
+              <a:t>Conclusions: LSTM vs GRU</a:t>
             </a:r>
-            <a:endParaRPr lang="en-US"/>
+            <a:endParaRPr lang="en-US" dirty="0"/>
           </a:p>
         </p:txBody>
       </p:sp>
@@ -14719,13 +14737,13 @@
           <a:lstStyle/>
           <a:p>
             <a:r>
-              <a:rPr lang="en-US">
+              <a:rPr lang="en-US" dirty="0">
                 <a:cs typeface="Biome"/>
               </a:rPr>
               <a:t>GRU was </a:t>
             </a:r>
             <a:r>
-              <a:rPr lang="en-US" b="1">
+              <a:rPr lang="en-US" b="1" dirty="0">
                 <a:solidFill>
                   <a:schemeClr val="accent3"/>
                 </a:solidFill>
@@ -14734,12 +14752,12 @@
               <a:t>slower </a:t>
             </a:r>
             <a:r>
-              <a:rPr lang="en-US">
+              <a:rPr lang="en-US" dirty="0">
                 <a:cs typeface="Biome"/>
               </a:rPr>
-              <a:t>than LTSM</a:t>
+              <a:t>than LSTM</a:t>
             </a:r>
-            <a:endParaRPr lang="en-US"/>
+            <a:endParaRPr lang="en-US" dirty="0"/>
           </a:p>
           <a:p>
             <a:endParaRPr lang="en-US" dirty="0">
@@ -14748,14 +14766,11 @@
           </a:p>
           <a:p>
             <a:r>
-              <a:rPr lang="en-US">
+              <a:rPr lang="en-US" dirty="0">
                 <a:cs typeface="Biome"/>
               </a:rPr>
               <a:t>Why is this?</a:t>
             </a:r>
-            <a:endParaRPr lang="en-US" dirty="0">
-              <a:cs typeface="Biome"/>
-            </a:endParaRPr>
           </a:p>
           <a:p>
             <a:pPr lvl="1">
@@ -14763,10 +14778,10 @@
               <a:buChar char="o"/>
             </a:pPr>
             <a:r>
-              <a:rPr lang="en-US">
+              <a:rPr lang="en-US" dirty="0">
                 <a:cs typeface="Biome"/>
               </a:rPr>
-              <a:t>Early stopping: GRU was trained for more epochs than LTSM</a:t>
+              <a:t>Early stopping: GRU was trained for more epochs than LSTM</a:t>
             </a:r>
           </a:p>
           <a:p>
@@ -14775,14 +14790,23 @@
               <a:buChar char="o"/>
             </a:pPr>
             <a:r>
-              <a:rPr lang="en-US">
+              <a:rPr lang="en-US" dirty="0">
                 <a:cs typeface="Biome"/>
               </a:rPr>
-              <a:t>GRUs adapt to changes in data faster than LTSMs, and NVIDIA is a volitile stock</a:t>
+              <a:t>GRUs adapt to changes in data faster than LSTMs, and NVIDIA is a </a:t>
             </a:r>
-            <a:endParaRPr lang="en-US" dirty="0">
-              <a:cs typeface="Biome"/>
-            </a:endParaRPr>
+            <a:r>
+              <a:rPr lang="en-US" dirty="0" err="1">
+                <a:cs typeface="Biome"/>
+              </a:rPr>
+              <a:t>volitile</a:t>
+            </a:r>
+            <a:r>
+              <a:rPr lang="en-US" dirty="0">
+                <a:cs typeface="Biome"/>
+              </a:rPr>
+              <a:t> stock</a:t>
+            </a:r>
           </a:p>
         </p:txBody>
       </p:sp>
@@ -16273,7 +16297,7 @@
               <a:rPr lang="en-US" dirty="0">
                 <a:cs typeface="Biome Light"/>
               </a:rPr>
-              <a:t>LTSM vs GRU Models</a:t>
+              <a:t>LSTM vs GRU Models</a:t>
             </a:r>
             <a:endParaRPr lang="en-US" dirty="0"/>
           </a:p>
@@ -16380,7 +16404,7 @@
               <a:rPr lang="en-US" dirty="0">
                 <a:cs typeface="Biome"/>
               </a:rPr>
-              <a:t>LTSM vs GRU Models</a:t>
+              <a:t>LSTM vs GRU Models</a:t>
             </a:r>
             <a:endParaRPr lang="en-US" dirty="0"/>
           </a:p>
@@ -16443,7 +16467,7 @@
               <a:rPr lang="en-US" dirty="0">
                 <a:cs typeface="Biome"/>
               </a:rPr>
-              <a:t>LTSMs have separate memory cell, input, output, and forget gates</a:t>
+              <a:t>LSTMs have separate memory cell, input, output, and forget gates</a:t>
             </a:r>
           </a:p>
           <a:p>
@@ -16561,7 +16585,7 @@
               <a:rPr lang="en-US" dirty="0">
                 <a:cs typeface="Biome"/>
               </a:rPr>
-              <a:t>LTSM vs GRU Models</a:t>
+              <a:t>LSTM vs GRU Models</a:t>
             </a:r>
             <a:endParaRPr lang="en-US" dirty="0"/>
           </a:p>
@@ -16599,7 +16623,7 @@
               <a:rPr lang="en-US" dirty="0">
                 <a:cs typeface="Biome"/>
               </a:rPr>
-              <a:t>LTSM RNNs take longer to train and require longer computational times than GRU models</a:t>
+              <a:t>LSTM RNNs take longer to train and require longer computational times than GRU models</a:t>
             </a:r>
           </a:p>
           <a:p>
@@ -16612,7 +16636,7 @@
               <a:rPr lang="en-US" dirty="0">
                 <a:cs typeface="Biome"/>
               </a:rPr>
-              <a:t>LTSMs can be more effective at handling long-term dependencies than GRUs</a:t>
+              <a:t>LSTMs can be more effective at handling long-term dependencies than GRUs</a:t>
             </a:r>
           </a:p>
           <a:p>
@@ -17479,6 +17503,15 @@
 </file>
 
 <file path=customXml/item1.xml><?xml version="1.0" encoding="utf-8"?>
+<?mso-contentType ?>
+<FormTemplates xmlns="http://schemas.microsoft.com/sharepoint/v3/contenttype/forms">
+  <Display>DocumentLibraryForm</Display>
+  <Edit>DocumentLibraryForm</Edit>
+  <New>DocumentLibraryForm</New>
+</FormTemplates>
+</file>
+
+<file path=customXml/item2.xml><?xml version="1.0" encoding="utf-8"?>
 <p:properties xmlns:p="http://schemas.microsoft.com/office/2006/metadata/properties" xmlns:xsi="http://www.w3.org/2001/XMLSchema-instance" xmlns:pc="http://schemas.microsoft.com/office/infopath/2007/PartnerControls">
   <documentManagement>
     <_ip_UnifiedCompliancePolicyUIAction xmlns="http://schemas.microsoft.com/sharepoint/v3" xsi:nil="true"/>
@@ -17496,15 +17529,6 @@
     <MediaServiceKeyPoints xmlns="71af3243-3dd4-4a8d-8c0d-dd76da1f02a5" xsi:nil="true"/>
   </documentManagement>
 </p:properties>
-</file>
-
-<file path=customXml/item2.xml><?xml version="1.0" encoding="utf-8"?>
-<?mso-contentType ?>
-<FormTemplates xmlns="http://schemas.microsoft.com/sharepoint/v3/contenttype/forms">
-  <Display>DocumentLibraryForm</Display>
-  <Edit>DocumentLibraryForm</Edit>
-  <New>DocumentLibraryForm</New>
-</FormTemplates>
 </file>
 
 <file path=customXml/item3.xml><?xml version="1.0" encoding="utf-8"?>
@@ -17820,6 +17844,14 @@
 </file>
 
 <file path=customXml/itemProps1.xml><?xml version="1.0" encoding="utf-8"?>
+<ds:datastoreItem xmlns:ds="http://schemas.openxmlformats.org/officeDocument/2006/customXml" ds:itemID="{A78D9019-7CE1-4B77-8F5D-67F6576598CB}">
+  <ds:schemaRefs>
+    <ds:schemaRef ds:uri="http://schemas.microsoft.com/sharepoint/v3/contenttype/forms"/>
+  </ds:schemaRefs>
+</ds:datastoreItem>
+</file>
+
+<file path=customXml/itemProps2.xml><?xml version="1.0" encoding="utf-8"?>
 <ds:datastoreItem xmlns:ds="http://schemas.openxmlformats.org/officeDocument/2006/customXml" ds:itemID="{E42E6C21-1752-4E06-9FE3-208D45ADB668}">
   <ds:schemaRefs>
     <ds:schemaRef ds:uri="http://schemas.microsoft.com/office/2006/metadata/properties"/>
@@ -17827,14 +17859,6 @@
     <ds:schemaRef ds:uri="http://schemas.microsoft.com/sharepoint/v3"/>
     <ds:schemaRef ds:uri="71af3243-3dd4-4a8d-8c0d-dd76da1f02a5"/>
     <ds:schemaRef ds:uri="230e9df3-be65-4c73-a93b-d1236ebd677e"/>
-  </ds:schemaRefs>
-</ds:datastoreItem>
-</file>
-
-<file path=customXml/itemProps2.xml><?xml version="1.0" encoding="utf-8"?>
-<ds:datastoreItem xmlns:ds="http://schemas.openxmlformats.org/officeDocument/2006/customXml" ds:itemID="{A78D9019-7CE1-4B77-8F5D-67F6576598CB}">
-  <ds:schemaRefs>
-    <ds:schemaRef ds:uri="http://schemas.microsoft.com/sharepoint/v3/contenttype/forms"/>
   </ds:schemaRefs>
 </ds:datastoreItem>
 </file>
